--- a/docs/webinars/07-contact-and-email.pptx
+++ b/docs/webinars/07-contact-and-email.pptx
@@ -512,7 +512,7 @@
           <a:p>
             <a:r>
               <a:rPr lang="en-US" dirty="0"/>
-              <a:t>This session is about every route a message can take from the website to the team: the two forms (which now deliver by email), the email links all over the site, the enquiries inbox they all land in, the daily habits, and the newsletter signups that are rolling out.</a:t>
+              <a:t>This session is about every route a message can take from the website to the team: the two forms (which deliver by email), the email links all over the site, the enquiries inbox they all land in, the daily habits, and the newsletter signups that are rolling out.</a:t>
             </a:r>
             <a:endParaRPr lang="en-US" dirty="0"/>
           </a:p>
@@ -600,7 +600,7 @@
           <a:p>
             <a:r>
               <a:rPr lang="en-US" dirty="0"/>
-              <a:t>Submissions are throttled per connection to blunt scripted spam, field lengths are capped, and everything travels as plain text. If forms start reporting failures, the first check is the Resend key in Vercel — same pattern as the repository token in webinar 06.</a:t>
+              <a:t>Submissions are throttled per connection to blunt scripted spam, field lengths are capped, and everything travels as plain text. If forms start reporting failures, the first check is the Resend key in Vercel. Same pattern as the repository token in webinar 06.</a:t>
             </a:r>
             <a:endParaRPr lang="en-US" dirty="0"/>
           </a:p>
@@ -864,7 +864,7 @@
           <a:p>
             <a:r>
               <a:rPr lang="en-US" dirty="0"/>
-              <a:t>The topics matter for routing once forms are wired: they are the future sorting labels. Today, the email address shown beside the form is the reliable path — next slides.</a:t>
+              <a:t>The topics matter for routing: they arrive in the email's subject line, so the inbox can be sorted at a glance. The address shown beside the form is noreply.ai@satisgroup.co.uk, the same inbox the form delivers to.</a:t>
             </a:r>
             <a:endParaRPr lang="en-US" dirty="0"/>
           </a:p>
@@ -952,7 +952,7 @@
           <a:p>
             <a:r>
               <a:rPr lang="en-US" dirty="0"/>
-              <a:t>This form landed in the same release wave as this training, and like the contact form it delivers by email — next slide.</a:t>
+              <a:t>This form landed in the same release wave as this training, and like the contact form it delivers by email. Next slide.</a:t>
             </a:r>
             <a:endParaRPr lang="en-US" dirty="0"/>
           </a:p>
@@ -1040,7 +1040,7 @@
           <a:p>
             <a:r>
               <a:rPr lang="en-US" dirty="0"/>
-              <a:t>The operational takeaway: form submissions and email-link messages land in the same inbox, and both are answered the same way — hit Reply. The failure mode is honest by design: no key or a provider outage means the visitor is told to email info@satisgroup.co.uk directly.</a:t>
+              <a:t>The operational takeaway: form submissions and email-link messages land in the same inbox, and both are answered the same way: hit Reply. The failure mode is honest by design. No key or a provider outage means the visitor is told to email noreply.ai@satisgroup.co.uk directly.</a:t>
             </a:r>
             <a:endParaRPr lang="en-US" dirty="0"/>
           </a:p>
@@ -1128,7 +1128,7 @@
           <a:p>
             <a:r>
               <a:rPr lang="en-US" dirty="0"/>
-              <a:t>Enquiry mail is delivered into the noreply.ai@satisgroup.co.uk mailbox — make sure everyone knows that is the inbox to watch. Form submissions land in the same place, so there is exactly one inbox to run. (If the team ever wants the visible on-page address changed, it is a one-sentence Claude request.)</a:t>
+              <a:t>Every email link on the site is addressed to noreply.ai@satisgroup.co.uk, and form submissions land in the same place, so there is exactly one inbox to run. If the team ever wants the address changed, it is a one-sentence Claude request.</a:t>
             </a:r>
             <a:endParaRPr lang="en-US" dirty="0"/>
           </a:p>
@@ -1216,7 +1216,7 @@
           <a:p>
             <a:r>
               <a:rPr lang="en-US" dirty="0"/>
-              <a:t>The portal rows are the clever ones: an investor asking about one task in one monthly report sends an email whose subject already names it — no 'which report do you mean?' round-trip. Treat subjects as routing signals in the inbox.</a:t>
+              <a:t>The portal rows are the clever ones: an investor asking about one task in one monthly report sends an email whose subject already names it. No 'which report do you mean?' round-trip. Treat subjects as routing signals in the inbox.</a:t>
             </a:r>
             <a:endParaRPr lang="en-US" dirty="0"/>
           </a:p>
@@ -1304,7 +1304,7 @@
           <a:p>
             <a:r>
               <a:rPr lang="en-US" dirty="0"/>
-              <a:t>Adapt names/rotas to how the team actually assigns ownership. The monthly self-test catches silent failures — a changed mailbox password, a forwarding rule gone stale — before an investor does.</a:t>
+              <a:t>Adapt names and rotas to how the team actually assigns ownership. The monthly self-test catches silent failures (an expired sending key, a changed mailbox password, a stale forwarding rule) before an investor does.</a:t>
             </a:r>
             <a:endParaRPr lang="en-US" dirty="0"/>
           </a:p>
@@ -1867,7 +1867,7 @@
                 <a:ea typeface="Work Sans" pitchFamily="34" charset="-122"/>
                 <a:cs typeface="Work Sans" pitchFamily="34" charset="-120"/>
               </a:rPr>
-              <a:t>SATIS GROUP — BACKEND WEBINAR SERIES</a:t>
+              <a:t>SATIS GROUP · BACKEND WEBINAR SERIES</a:t>
             </a:r>
             <a:endParaRPr lang="en-US" sz="950" dirty="0"/>
           </a:p>
@@ -2026,7 +2026,7 @@
                 <a:ea typeface="Work Sans" pitchFamily="34" charset="-122"/>
                 <a:cs typeface="Work Sans" pitchFamily="34" charset="-120"/>
               </a:rPr>
-              <a:t>How enquiries reach the team today — the forms, the email links, the enquiries inbox, and what is changing next.</a:t>
+              <a:t>How enquiries reach the team: the forms, the email links, the enquiries inbox, and the daily habits that turn them into replies.</a:t>
             </a:r>
             <a:endParaRPr lang="en-US" sz="1200" dirty="0"/>
           </a:p>
@@ -2269,7 +2269,7 @@
                 <a:ea typeface="Work Sans" pitchFamily="34" charset="-122"/>
                 <a:cs typeface="Work Sans" pitchFamily="34" charset="-120"/>
               </a:rPr>
-              <a:t>SATIS GROUP — CONTACT &amp; EMAIL</a:t>
+              <a:t>SATIS GROUP · CONTACT &amp; EMAIL</a:t>
             </a:r>
             <a:endParaRPr lang="en-US" sz="700" dirty="0"/>
           </a:p>
@@ -2347,7 +2347,7 @@
                 <a:ea typeface="Work Sans" pitchFamily="34" charset="-122"/>
                 <a:cs typeface="Work Sans" pitchFamily="34" charset="-120"/>
               </a:rPr>
-              <a:t>What powers the form email — and its one setting.</a:t>
+              <a:t>What powers the form email, and its one setting.</a:t>
             </a:r>
             <a:endParaRPr lang="en-US" sz="2500" dirty="0"/>
           </a:p>
@@ -2529,7 +2529,7 @@
                 <a:ea typeface="Work Sans" pitchFamily="34" charset="-122"/>
                 <a:cs typeface="Work Sans" pitchFamily="34" charset="-120"/>
               </a:rPr>
-              <a:t>The site hands each submission to Resend, an email-delivery service, as plain text — nothing a visitor types is ever rendered as a web page or stored on the site.</a:t>
+              <a:t>The site hands each submission to Resend, an email-delivery service, as plain text. Nothing a visitor types is ever rendered as a web page or stored on the site.</a:t>
             </a:r>
             <a:endParaRPr lang="en-US" sz="1050" dirty="0"/>
           </a:p>
@@ -2669,7 +2669,7 @@
                 <a:ea typeface="Work Sans" pitchFamily="34" charset="-122"/>
                 <a:cs typeface="Work Sans" pitchFamily="34" charset="-120"/>
               </a:rPr>
-              <a:t>SATIS_RESEND_API_KEY in Vercel's environment settings. Missing or expired, forms show the visitor the team's address instead of pretending to send — and the fix is the usual settings-plus-redeploy routine from webinar 06.</a:t>
+              <a:t>SATIS_RESEND_API_KEY in Vercel's environment settings. Missing or expired, forms show the visitor the team's address instead of pretending to send, and the fix is the usual settings-plus-redeploy routine from webinar 06.</a:t>
             </a:r>
             <a:endParaRPr lang="en-US" sz="1050" dirty="0"/>
           </a:p>
@@ -2934,7 +2934,7 @@
                 <a:ea typeface="Work Sans" pitchFamily="34" charset="-122"/>
                 <a:cs typeface="Work Sans" pitchFamily="34" charset="-120"/>
               </a:rPr>
-              <a:t>The same Resend account can later send the newsletter to the subscriber list — the sending rail is already in place.</a:t>
+              <a:t>The same Resend account can later send the newsletter to the subscriber list. The sending rail is already in place.</a:t>
             </a:r>
             <a:endParaRPr lang="en-US" sz="1100" dirty="0"/>
           </a:p>
@@ -3145,7 +3145,7 @@
                 <a:ea typeface="Work Sans" pitchFamily="34" charset="-122"/>
                 <a:cs typeface="Work Sans" pitchFamily="34" charset="-120"/>
               </a:rPr>
-              <a:t>SATIS GROUP — CONTACT &amp; EMAIL</a:t>
+              <a:t>SATIS GROUP · CONTACT &amp; EMAIL</a:t>
             </a:r>
             <a:endParaRPr lang="en-US" sz="700" dirty="0"/>
           </a:p>
@@ -3293,7 +3293,7 @@
                 <a:ea typeface="Work Sans" pitchFamily="34" charset="-122"/>
                 <a:cs typeface="Work Sans" pitchFamily="34" charset="-120"/>
               </a:rPr>
-              <a:t>Replies are one click — the sender rides on Reply-To of every form submission.</a:t>
+              <a:t>Replies are one click. The sender rides on Reply-To of every form submission.</a:t>
             </a:r>
             <a:endParaRPr lang="en-US" sz="1250" dirty="0"/>
           </a:p>
@@ -3317,7 +3317,7 @@
                 <a:ea typeface="Work Sans" pitchFamily="34" charset="-122"/>
                 <a:cs typeface="Work Sans" pitchFamily="34" charset="-120"/>
               </a:rPr>
-              <a:t>Portal links pre-fill the subject — let them route the inbox.</a:t>
+              <a:t>Portal links pre-fill the subject. Let them route the inbox.</a:t>
             </a:r>
             <a:endParaRPr lang="en-US" sz="1250" dirty="0"/>
           </a:p>
@@ -3341,7 +3341,7 @@
                 <a:ea typeface="Work Sans" pitchFamily="34" charset="-122"/>
                 <a:cs typeface="Work Sans" pitchFamily="34" charset="-120"/>
               </a:rPr>
-              <a:t>Watch the enquiries mailbox daily; log investment enquiries the same day.</a:t>
+              <a:t>Watch noreply.ai@satisgroup.co.uk daily; log investment enquiries the same day.</a:t>
             </a:r>
             <a:endParaRPr lang="en-US" sz="1250" dirty="0"/>
           </a:p>
@@ -3365,7 +3365,7 @@
                 <a:ea typeface="Work Sans" pitchFamily="34" charset="-122"/>
                 <a:cs typeface="Work Sans" pitchFamily="34" charset="-120"/>
               </a:rPr>
-              <a:t>Sending fails loud, never silent — the visitor is shown the team's address if it ever can't send.</a:t>
+              <a:t>Sending fails loud, never silent: the visitor is shown the team's address if it ever can't send.</a:t>
             </a:r>
             <a:endParaRPr lang="en-US" sz="1250" dirty="0"/>
           </a:p>
@@ -3800,7 +3800,7 @@
                 <a:ea typeface="Work Sans" pitchFamily="34" charset="-122"/>
                 <a:cs typeface="Work Sans" pitchFamily="34" charset="-120"/>
               </a:rPr>
-              <a:t>SATIS GROUP — CONTACT &amp; EMAIL</a:t>
+              <a:t>SATIS GROUP · CONTACT &amp; EMAIL</a:t>
             </a:r>
             <a:endParaRPr lang="en-US" sz="700" dirty="0"/>
           </a:p>
@@ -3920,7 +3920,7 @@
                 <a:ea typeface="Work Sans" pitchFamily="34" charset="-122"/>
                 <a:cs typeface="Work Sans" pitchFamily="34" charset="-120"/>
               </a:rPr>
-              <a:t>Every route from a visitor's screen to a Satis inbox — how each one delivers, and the habits that turn enquiries into replies.</a:t>
+              <a:t>Every route from a visitor's screen to a Satis inbox: how each one delivers, and the habits that turn enquiries into replies.</a:t>
             </a:r>
             <a:endParaRPr lang="en-US" sz="1150" dirty="0"/>
           </a:p>
@@ -4844,7 +4844,7 @@
                 <a:ea typeface="Work Sans" pitchFamily="34" charset="-122"/>
                 <a:cs typeface="Work Sans" pitchFamily="34" charset="-120"/>
               </a:rPr>
-              <a:t>SATIS GROUP — CONTACT &amp; EMAIL</a:t>
+              <a:t>SATIS GROUP · CONTACT &amp; EMAIL</a:t>
             </a:r>
             <a:endParaRPr lang="en-US" sz="700" dirty="0"/>
           </a:p>
@@ -4967,7 +4967,7 @@
                 <a:ea typeface="Work Sans" pitchFamily="34" charset="-122"/>
                 <a:cs typeface="Work Sans" pitchFamily="34" charset="-120"/>
               </a:rPr>
-              <a:t>The public contact page carries a form with a topic selector — General enquiry, Property enquiry, or Investment — plus name, email and message.
+              <a:t>The public contact page carries a form with a topic selector (General enquiry, Property enquiry, or Investment) plus name, email and message.
 </a:t>
             </a:r>
             <a:pPr indent="0" marL="0">
@@ -5098,7 +5098,7 @@
                 <a:ea typeface="Work Sans" pitchFamily="34" charset="-122"/>
                 <a:cs typeface="Work Sans" pitchFamily="34" charset="-120"/>
               </a:rPr>
-              <a:t>The form on /contact — name, email, topic, message.</a:t>
+              <a:t>The form on /contact: name, email, topic, message.</a:t>
             </a:r>
             <a:endParaRPr lang="en-US" sz="850" dirty="0"/>
           </a:p>
@@ -5302,7 +5302,7 @@
                 <a:ea typeface="Work Sans" pitchFamily="34" charset="-122"/>
                 <a:cs typeface="Work Sans" pitchFamily="34" charset="-120"/>
               </a:rPr>
-              <a:t>SATIS GROUP — CONTACT &amp; EMAIL</a:t>
+              <a:t>SATIS GROUP · CONTACT &amp; EMAIL</a:t>
             </a:r>
             <a:endParaRPr lang="en-US" sz="700" dirty="0"/>
           </a:p>
@@ -5425,7 +5425,7 @@
                 <a:ea typeface="Work Sans" pitchFamily="34" charset="-122"/>
                 <a:cs typeface="Work Sans" pitchFamily="34" charset="-120"/>
               </a:rPr>
-              <a:t>New: prospective investors get their own short form — name, email, company, and an optional note — styled like the investor platform they have just been reading.
+              <a:t>New: prospective investors get their own short form (name, email, company, and an optional note), styled like the investor platform they have just been reading.
 </a:t>
             </a:r>
             <a:pPr indent="0" marL="0">
@@ -5467,7 +5467,7 @@
                 <a:ea typeface="Work Sans" pitchFamily="34" charset="-122"/>
                 <a:cs typeface="Work Sans" pitchFamily="34" charset="-120"/>
               </a:rPr>
-              <a:t>It asks for who they represent — the question the general form never asked.
+              <a:t>It asks for who they represent: the question the general form never asked.
 </a:t>
             </a:r>
             <a:endParaRPr lang="en-US" sz="1100" dirty="0"/>
@@ -5556,7 +5556,7 @@
                 <a:ea typeface="Work Sans" pitchFamily="34" charset="-122"/>
                 <a:cs typeface="Work Sans" pitchFamily="34" charset="-120"/>
               </a:rPr>
-              <a:t>“Become an investor” now leads here — matching the platform's black and gold.</a:t>
+              <a:t>“Become an investor” now leads here, matching the platform's black and gold.</a:t>
             </a:r>
             <a:endParaRPr lang="en-US" sz="850" dirty="0"/>
           </a:p>
@@ -5767,7 +5767,7 @@
                 <a:ea typeface="Work Sans" pitchFamily="34" charset="-122"/>
                 <a:cs typeface="Work Sans" pitchFamily="34" charset="-120"/>
               </a:rPr>
-              <a:t>SATIS GROUP — CONTACT &amp; EMAIL</a:t>
+              <a:t>SATIS GROUP · CONTACT &amp; EMAIL</a:t>
             </a:r>
             <a:endParaRPr lang="en-US" sz="700" dirty="0"/>
           </a:p>
@@ -5848,7 +5848,7 @@
                 <a:ea typeface="Work Sans" pitchFamily="34" charset="-122"/>
                 <a:cs typeface="Work Sans" pitchFamily="34" charset="-120"/>
               </a:rPr>
-              <a:t>Form submissions arrive as email — reply-ready.</a:t>
+              <a:t>Form submissions arrive as email, reply-ready.</a:t>
             </a:r>
             <a:endParaRPr lang="en-US" sz="2600" dirty="0"/>
           </a:p>
@@ -5890,7 +5890,7 @@
                 <a:ea typeface="Work Sans" pitchFamily="34" charset="-122"/>
                 <a:cs typeface="Work Sans" pitchFamily="34" charset="-120"/>
               </a:rPr>
-              <a:t>Both forms email the enquiry to the enquiries inbox the moment the visitor presses send: the topic rides in the subject line, and the sender's address is set as Reply-To, so answering is one click of Reply. If sending ever fails, the visitor is shown the team's email address and asked to write directly — an enquiry is never dropped silently.</a:t>
+              <a:t>Both forms email the enquiry to the enquiries inbox the moment the visitor presses send: the topic rides in the subject line, and the sender's address is set as Reply-To, so answering is one click of Reply. If sending ever fails, the visitor is shown the team's email address and asked to write directly. An enquiry is never dropped silently.</a:t>
             </a:r>
             <a:endParaRPr lang="en-US" sz="1250" dirty="0"/>
           </a:p>
@@ -6094,7 +6094,7 @@
                 <a:ea typeface="Work Sans" pitchFamily="34" charset="-122"/>
                 <a:cs typeface="Work Sans" pitchFamily="34" charset="-120"/>
               </a:rPr>
-              <a:t>SATIS GROUP — CONTACT &amp; EMAIL</a:t>
+              <a:t>SATIS GROUP · CONTACT &amp; EMAIL</a:t>
             </a:r>
             <a:endParaRPr lang="en-US" sz="700" dirty="0"/>
           </a:p>
@@ -6214,7 +6214,7 @@
                 <a:ea typeface="Work Sans" pitchFamily="34" charset="-122"/>
                 <a:cs typeface="Work Sans" pitchFamily="34" charset="-120"/>
               </a:rPr>
-              <a:t>Alongside the forms, everywhere the site says “email us” the link opens the visitor's own mail app with the address — and often the subject — already filled in:</a:t>
+              <a:t>Alongside the forms, everywhere the site says “email us” the link opens the visitor's own mail app with the address, and often the subject, already filled in:</a:t>
             </a:r>
             <a:endParaRPr lang="en-US" sz="1150" dirty="0"/>
           </a:p>
@@ -6600,7 +6600,7 @@
                 <a:ea typeface="Work Sans" pitchFamily="34" charset="-122"/>
                 <a:cs typeface="Work Sans" pitchFamily="34" charset="-120"/>
               </a:rPr>
-              <a:t>it is ordinary email, end to end. Nothing on the website has to run, store or forward anything — the message travels from the visitor's own mail account to the Satis mailbox at 123 Reg.</a:t>
+              <a:t>it is ordinary email, end to end. Nothing on the website has to run, store or forward anything. The message travels from the visitor's own mail account to the Satis mailbox at 123 Reg.</a:t>
             </a:r>
             <a:endParaRPr lang="en-US" sz="1150" dirty="0"/>
           </a:p>
@@ -6664,7 +6664,7 @@
                 <a:ea typeface="Work Sans" pitchFamily="34" charset="-122"/>
                 <a:cs typeface="Work Sans" pitchFamily="34" charset="-120"/>
               </a:rPr>
-              <a:t>THE WORKING CHANNEL</a:t>
+              <a:t>THE EMAIL LINKS</a:t>
             </a:r>
             <a:endParaRPr lang="en-US" sz="950" dirty="0"/>
           </a:p>
@@ -6804,7 +6804,7 @@
                 <a:ea typeface="Work Sans" pitchFamily="34" charset="-122"/>
                 <a:cs typeface="Work Sans" pitchFamily="34" charset="-120"/>
               </a:rPr>
-              <a:t>SATIS GROUP — CONTACT &amp; EMAIL</a:t>
+              <a:t>SATIS GROUP · CONTACT &amp; EMAIL</a:t>
             </a:r>
             <a:endParaRPr lang="en-US" sz="700" dirty="0"/>
           </a:p>
@@ -7127,7 +7127,7 @@
                           <a:ea typeface="Work Sans" pitchFamily="34" charset="-122"/>
                           <a:cs typeface="Work Sans" pitchFamily="34" charset="-120"/>
                         </a:rPr>
-                        <a:t>Footer — every page</a:t>
+                        <a:t>Footer · every page</a:t>
                       </a:r>
                       <a:endParaRPr lang="en-US" sz="1000" dirty="0">
                         <a:latin typeface="Work Sans" charset="0"/>
@@ -7221,7 +7221,7 @@
                           <a:ea typeface="Work Sans" pitchFamily="34" charset="-122"/>
                           <a:cs typeface="Work Sans" pitchFamily="34" charset="-120"/>
                         </a:rPr>
-                        <a:t>—</a:t>
+                        <a:t>none</a:t>
                       </a:r>
                       <a:endParaRPr lang="en-US" sz="1000" dirty="0">
                         <a:latin typeface="Work Sans" charset="0"/>
@@ -7364,7 +7364,7 @@
                           <a:ea typeface="Work Sans" pitchFamily="34" charset="-122"/>
                           <a:cs typeface="Work Sans" pitchFamily="34" charset="-120"/>
                         </a:rPr>
-                        <a:t>—</a:t>
+                        <a:t>none</a:t>
                       </a:r>
                       <a:endParaRPr lang="en-US" sz="1000" dirty="0">
                         <a:latin typeface="Work Sans" charset="0"/>
@@ -7699,7 +7699,7 @@
                           <a:ea typeface="Work Sans" pitchFamily="34" charset="-122"/>
                           <a:cs typeface="Work Sans" pitchFamily="34" charset="-120"/>
                         </a:rPr>
-                        <a:t>Portal — opportunities</a:t>
+                        <a:t>Portal · opportunities</a:t>
                       </a:r>
                       <a:endParaRPr lang="en-US" sz="1000" dirty="0">
                         <a:latin typeface="Work Sans" charset="0"/>
@@ -7842,7 +7842,7 @@
                           <a:ea typeface="Work Sans" pitchFamily="34" charset="-122"/>
                           <a:cs typeface="Work Sans" pitchFamily="34" charset="-120"/>
                         </a:rPr>
-                        <a:t>Portal — insights</a:t>
+                        <a:t>Portal · insights</a:t>
                       </a:r>
                       <a:endParaRPr lang="en-US" sz="1000" dirty="0">
                         <a:latin typeface="Work Sans" charset="0"/>
@@ -7985,7 +7985,7 @@
                           <a:ea typeface="Work Sans" pitchFamily="34" charset="-122"/>
                           <a:cs typeface="Work Sans" pitchFamily="34" charset="-120"/>
                         </a:rPr>
-                        <a:t>Portal — report tasks</a:t>
+                        <a:t>Portal · report tasks</a:t>
                       </a:r>
                       <a:endParaRPr lang="en-US" sz="1000" dirty="0">
                         <a:latin typeface="Work Sans" charset="0"/>
@@ -8312,7 +8312,7 @@
                 <a:ea typeface="Work Sans" pitchFamily="34" charset="-122"/>
                 <a:cs typeface="Work Sans" pitchFamily="34" charset="-120"/>
               </a:rPr>
-              <a:t>SATIS GROUP — CONTACT &amp; EMAIL</a:t>
+              <a:t>SATIS GROUP · CONTACT &amp; EMAIL</a:t>
             </a:r>
             <a:endParaRPr lang="en-US" sz="700" dirty="0"/>
           </a:p>
@@ -8530,7 +8530,7 @@
                 <a:ea typeface="Work Sans" pitchFamily="34" charset="-122"/>
                 <a:cs typeface="Work Sans" pitchFamily="34" charset="-120"/>
               </a:rPr>
-              <a:t>That is where form submissions and the site's email links deliver. Put it on whoever owns enquiries that week — phones included, since investor questions deserve same-day replies.</a:t>
+              <a:t>That is where form submissions and the site's email links deliver. Put it on whoever owns enquiries that week, phones included, since investor questions deserve same-day replies.</a:t>
             </a:r>
             <a:endParaRPr lang="en-US" sz="1050" dirty="0"/>
           </a:p>
@@ -8670,7 +8670,7 @@
                 <a:ea typeface="Work Sans" pitchFamily="34" charset="-122"/>
                 <a:cs typeface="Work Sans" pitchFamily="34" charset="-120"/>
               </a:rPr>
-              <a:t>Answers should come from a person, not a no-reply address — move the thread to your own mailbox with the enquiry quoted.</a:t>
+              <a:t>Answers should come from a person, not a no-reply address. Move the thread to your own mailbox with the enquiry quoted.</a:t>
             </a:r>
             <a:endParaRPr lang="en-US" sz="1050" dirty="0"/>
           </a:p>
@@ -8950,7 +8950,7 @@
                 <a:ea typeface="Work Sans" pitchFamily="34" charset="-122"/>
                 <a:cs typeface="Work Sans" pitchFamily="34" charset="-120"/>
               </a:rPr>
-              <a:t>Anything that could become a cheque deserves a row in the pipeline sheet the same day — enquiries that only live in an inbox get lost.</a:t>
+              <a:t>Anything that could become a cheque deserves a row in the pipeline sheet the same day. Enquiries that only live in an inbox get lost.</a:t>
             </a:r>
             <a:endParaRPr lang="en-US" sz="1050" dirty="0"/>
           </a:p>
@@ -9075,7 +9075,7 @@
                 <a:ea typeface="Work Sans" pitchFamily="34" charset="-122"/>
                 <a:cs typeface="Work Sans" pitchFamily="34" charset="-120"/>
               </a:rPr>
-              <a:t>Once a month, click the site's own links and email in a test enquiry. If it reaches the inbox and gets answered within a day, the channel works.</a:t>
+              <a:t>Once a month, send a test enquiry through the contact form and click one email link. If both reach the inbox and get answered within a day, the channel works.</a:t>
             </a:r>
             <a:endParaRPr lang="en-US" sz="1100" dirty="0"/>
           </a:p>
@@ -9279,7 +9279,7 @@
                 <a:ea typeface="Work Sans" pitchFamily="34" charset="-122"/>
                 <a:cs typeface="Work Sans" pitchFamily="34" charset="-120"/>
               </a:rPr>
-              <a:t>SATIS GROUP — CONTACT &amp; EMAIL</a:t>
+              <a:t>SATIS GROUP · CONTACT &amp; EMAIL</a:t>
             </a:r>
             <a:endParaRPr lang="en-US" sz="700" dirty="0"/>
           </a:p>
@@ -9679,7 +9679,7 @@
                 <a:ea typeface="Work Sans" pitchFamily="34" charset="-122"/>
                 <a:cs typeface="Work Sans" pitchFamily="34" charset="-120"/>
               </a:rPr>
-              <a:t>A section on the admin newsletter page showing signups as a list you can review and mail — being deployed as these materials are written.</a:t>
+              <a:t>A section on the admin newsletter page showing signups as a list you can review and mail. Being deployed as these materials are written.</a:t>
             </a:r>
             <a:endParaRPr lang="en-US" sz="1050" dirty="0"/>
           </a:p>
@@ -9819,7 +9819,7 @@
                 <a:ea typeface="Work Sans" pitchFamily="34" charset="-122"/>
                 <a:cs typeface="Work Sans" pitchFamily="34" charset="-120"/>
               </a:rPr>
-              <a:t>Signups are not stored — treat the box as decorative and gather addresses another way. Check /admin/newsletter to see whether the section has arrived.</a:t>
+              <a:t>Signups are not stored. Treat the box as decorative and gather addresses another way. Check /admin/newsletter to see whether the section has arrived.</a:t>
             </a:r>
             <a:endParaRPr lang="en-US" sz="1050" dirty="0"/>
           </a:p>
